--- a/backend/onyx/server/features/build/sandbox/image/templates/pptx/pitch-deck.pptx
+++ b/backend/onyx/server/features/build/sandbox/image/templates/pptx/pitch-deck.pptx
@@ -20,20 +20,6 @@
   </p:sldIdLst>
   <p:sldSz cx="18288000" cy="10287000"/>
   <p:notesSz cx="6858000" cy="9144000"/>
-  <p:embeddedFontLst>
-    <p:embeddedFont>
-      <p:font typeface="Loubag" charset="1" panose="02020A03060303060403"/>
-      <p:regular r:id="rId18"/>
-    </p:embeddedFont>
-    <p:embeddedFont>
-      <p:font typeface="Kabel" charset="1" panose="020D0402020204020903"/>
-      <p:regular r:id="rId19"/>
-    </p:embeddedFont>
-    <p:embeddedFont>
-      <p:font typeface="Kabel Ultra-Bold" charset="1" panose="020D0602020203020903"/>
-      <p:regular r:id="rId20"/>
-    </p:embeddedFont>
-  </p:embeddedFontLst>
   <p:defaultTextStyle>
     <a:defPPr>
       <a:defRPr lang="en-US"/>
@@ -3308,10 +3294,10 @@
                 <a:solidFill>
                   <a:srgbClr val="3C7F72"/>
                 </a:solidFill>
-                <a:latin typeface="Loubag"/>
-                <a:ea typeface="Loubag"/>
-                <a:cs typeface="Loubag"/>
-                <a:sym typeface="Loubag"/>
+                <a:latin typeface="Montserrat"/>
+                <a:ea typeface="Montserrat"/>
+                <a:cs typeface="Montserrat"/>
+                <a:sym typeface="Montserrat"/>
               </a:rPr>
               <a:t>Pitch Deck</a:t>
             </a:r>
@@ -3349,10 +3335,10 @@
                 <a:solidFill>
                   <a:srgbClr val="992800"/>
                 </a:solidFill>
-                <a:latin typeface="Kabel"/>
-                <a:ea typeface="Kabel"/>
-                <a:cs typeface="Kabel"/>
-                <a:sym typeface="Kabel"/>
+                <a:latin typeface="Montserrat"/>
+                <a:ea typeface="Montserrat"/>
+                <a:cs typeface="Montserrat"/>
+                <a:sym typeface="Montserrat"/>
               </a:rPr>
               <a:t>Logo</a:t>
             </a:r>
@@ -3390,10 +3376,10 @@
                 <a:solidFill>
                   <a:srgbClr val="992800"/>
                 </a:solidFill>
-                <a:latin typeface="Kabel"/>
-                <a:ea typeface="Kabel"/>
-                <a:cs typeface="Kabel"/>
-                <a:sym typeface="Kabel"/>
+                <a:latin typeface="Montserrat"/>
+                <a:ea typeface="Montserrat"/>
+                <a:cs typeface="Montserrat"/>
+                <a:sym typeface="Montserrat"/>
               </a:rPr>
               <a:t>Driven by Purpose, Powered by Innovation.</a:t>
             </a:r>
@@ -3431,10 +3417,10 @@
                 <a:solidFill>
                   <a:srgbClr val="992800"/>
                 </a:solidFill>
-                <a:latin typeface="Kabel"/>
-                <a:ea typeface="Kabel"/>
-                <a:cs typeface="Kabel"/>
-                <a:sym typeface="Kabel"/>
+                <a:latin typeface="Montserrat"/>
+                <a:ea typeface="Montserrat"/>
+                <a:cs typeface="Montserrat"/>
+                <a:sym typeface="Montserrat"/>
               </a:rPr>
               <a:t>2030</a:t>
             </a:r>
@@ -3708,10 +3694,10 @@
                 <a:solidFill>
                   <a:srgbClr val="3C7F72"/>
                 </a:solidFill>
-                <a:latin typeface="Loubag"/>
-                <a:ea typeface="Loubag"/>
-                <a:cs typeface="Loubag"/>
-                <a:sym typeface="Loubag"/>
+                <a:latin typeface="Montserrat"/>
+                <a:ea typeface="Montserrat"/>
+                <a:cs typeface="Montserrat"/>
+                <a:sym typeface="Montserrat"/>
               </a:rPr>
               <a:t>Financials</a:t>
             </a:r>
@@ -3752,10 +3738,10 @@
                 <a:solidFill>
                   <a:srgbClr val="FDF9ED"/>
                 </a:solidFill>
-                <a:latin typeface="Kabel"/>
-                <a:ea typeface="Kabel"/>
-                <a:cs typeface="Kabel"/>
-                <a:sym typeface="Kabel"/>
+                <a:latin typeface="Montserrat"/>
+                <a:ea typeface="Montserrat"/>
+                <a:cs typeface="Montserrat"/>
+                <a:sym typeface="Montserrat"/>
               </a:rPr>
               <a:t>Lorem ipsum dolor sit amet, consectetur adipiscing elit. Maecenas scelerisque sapien quam, et ornare tortor faucibus at. </a:t>
             </a:r>
@@ -3796,10 +3782,10 @@
                 <a:solidFill>
                   <a:srgbClr val="FDF9ED"/>
                 </a:solidFill>
-                <a:latin typeface="Kabel"/>
-                <a:ea typeface="Kabel"/>
-                <a:cs typeface="Kabel"/>
-                <a:sym typeface="Kabel"/>
+                <a:latin typeface="Montserrat"/>
+                <a:ea typeface="Montserrat"/>
+                <a:cs typeface="Montserrat"/>
+                <a:sym typeface="Montserrat"/>
               </a:rPr>
               <a:t>P</a:t>
             </a:r>
@@ -3808,10 +3794,10 @@
                 <a:solidFill>
                   <a:srgbClr val="FDF9ED"/>
                 </a:solidFill>
-                <a:latin typeface="Kabel"/>
-                <a:ea typeface="Kabel"/>
-                <a:cs typeface="Kabel"/>
-                <a:sym typeface="Kabel"/>
+                <a:latin typeface="Montserrat"/>
+                <a:ea typeface="Montserrat"/>
+                <a:cs typeface="Montserrat"/>
+                <a:sym typeface="Montserrat"/>
               </a:rPr>
               <a:t>rojection</a:t>
             </a:r>
@@ -3852,10 +3838,10 @@
                 <a:solidFill>
                   <a:srgbClr val="992800"/>
                 </a:solidFill>
-                <a:latin typeface="Kabel"/>
-                <a:ea typeface="Kabel"/>
-                <a:cs typeface="Kabel"/>
-                <a:sym typeface="Kabel"/>
+                <a:latin typeface="Montserrat"/>
+                <a:ea typeface="Montserrat"/>
+                <a:cs typeface="Montserrat"/>
+                <a:sym typeface="Montserrat"/>
               </a:rPr>
               <a:t>Lorem ipsum dolor sit amet, consectetur adipiscing elit. Maecenas scelerisque sapien quam, et ornare tortor faucibus at. </a:t>
             </a:r>
@@ -3896,10 +3882,10 @@
                 <a:solidFill>
                   <a:srgbClr val="992800"/>
                 </a:solidFill>
-                <a:latin typeface="Kabel"/>
-                <a:ea typeface="Kabel"/>
-                <a:cs typeface="Kabel"/>
-                <a:sym typeface="Kabel"/>
+                <a:latin typeface="Montserrat"/>
+                <a:ea typeface="Montserrat"/>
+                <a:cs typeface="Montserrat"/>
+                <a:sym typeface="Montserrat"/>
               </a:rPr>
               <a:t>Sh</a:t>
             </a:r>
@@ -3908,10 +3894,10 @@
                 <a:solidFill>
                   <a:srgbClr val="992800"/>
                 </a:solidFill>
-                <a:latin typeface="Kabel"/>
-                <a:ea typeface="Kabel"/>
-                <a:cs typeface="Kabel"/>
-                <a:sym typeface="Kabel"/>
+                <a:latin typeface="Montserrat"/>
+                <a:ea typeface="Montserrat"/>
+                <a:cs typeface="Montserrat"/>
+                <a:sym typeface="Montserrat"/>
               </a:rPr>
               <a:t>ort Unit Economics</a:t>
             </a:r>
@@ -3952,10 +3938,10 @@
                 <a:solidFill>
                   <a:srgbClr val="992800"/>
                 </a:solidFill>
-                <a:latin typeface="Kabel"/>
-                <a:ea typeface="Kabel"/>
-                <a:cs typeface="Kabel"/>
-                <a:sym typeface="Kabel"/>
+                <a:latin typeface="Montserrat"/>
+                <a:ea typeface="Montserrat"/>
+                <a:cs typeface="Montserrat"/>
+                <a:sym typeface="Montserrat"/>
               </a:rPr>
               <a:t>Lorem ipsum dolor sit amet, consectetur adipiscing elit. Maecenas scelerisque sapien quam, et ornare tortor faucibus at. </a:t>
             </a:r>
@@ -3996,10 +3982,10 @@
                 <a:solidFill>
                   <a:srgbClr val="992800"/>
                 </a:solidFill>
-                <a:latin typeface="Kabel"/>
-                <a:ea typeface="Kabel"/>
-                <a:cs typeface="Kabel"/>
-                <a:sym typeface="Kabel"/>
+                <a:latin typeface="Montserrat"/>
+                <a:ea typeface="Montserrat"/>
+                <a:cs typeface="Montserrat"/>
+                <a:sym typeface="Montserrat"/>
               </a:rPr>
               <a:t>Capital Requi</a:t>
             </a:r>
@@ -4008,10 +3994,10 @@
                 <a:solidFill>
                   <a:srgbClr val="992800"/>
                 </a:solidFill>
-                <a:latin typeface="Kabel"/>
-                <a:ea typeface="Kabel"/>
-                <a:cs typeface="Kabel"/>
-                <a:sym typeface="Kabel"/>
+                <a:latin typeface="Montserrat"/>
+                <a:ea typeface="Montserrat"/>
+                <a:cs typeface="Montserrat"/>
+                <a:sym typeface="Montserrat"/>
               </a:rPr>
               <a:t>rements &amp; Use of Funds</a:t>
             </a:r>
@@ -4957,10 +4943,10 @@
                 <a:solidFill>
                   <a:srgbClr val="FDF9ED"/>
                 </a:solidFill>
-                <a:latin typeface="Kabel"/>
-                <a:ea typeface="Kabel"/>
-                <a:cs typeface="Kabel"/>
-                <a:sym typeface="Kabel"/>
+                <a:latin typeface="Montserrat"/>
+                <a:ea typeface="Montserrat"/>
+                <a:cs typeface="Montserrat"/>
+                <a:sym typeface="Montserrat"/>
               </a:rPr>
               <a:t>Olivi</a:t>
             </a:r>
@@ -4969,10 +4955,10 @@
                 <a:solidFill>
                   <a:srgbClr val="FDF9ED"/>
                 </a:solidFill>
-                <a:latin typeface="Kabel"/>
-                <a:ea typeface="Kabel"/>
-                <a:cs typeface="Kabel"/>
-                <a:sym typeface="Kabel"/>
+                <a:latin typeface="Montserrat"/>
+                <a:ea typeface="Montserrat"/>
+                <a:cs typeface="Montserrat"/>
+                <a:sym typeface="Montserrat"/>
               </a:rPr>
               <a:t>a Wilson</a:t>
             </a:r>
@@ -5010,10 +4996,10 @@
                 <a:solidFill>
                   <a:srgbClr val="FDF9ED"/>
                 </a:solidFill>
-                <a:latin typeface="Kabel"/>
-                <a:ea typeface="Kabel"/>
-                <a:cs typeface="Kabel"/>
-                <a:sym typeface="Kabel"/>
+                <a:latin typeface="Montserrat"/>
+                <a:ea typeface="Montserrat"/>
+                <a:cs typeface="Montserrat"/>
+                <a:sym typeface="Montserrat"/>
               </a:rPr>
               <a:t>Riki S</a:t>
             </a:r>
@@ -5022,10 +5008,10 @@
                 <a:solidFill>
                   <a:srgbClr val="FDF9ED"/>
                 </a:solidFill>
-                <a:latin typeface="Kabel"/>
-                <a:ea typeface="Kabel"/>
-                <a:cs typeface="Kabel"/>
-                <a:sym typeface="Kabel"/>
+                <a:latin typeface="Montserrat"/>
+                <a:ea typeface="Montserrat"/>
+                <a:cs typeface="Montserrat"/>
+                <a:sym typeface="Montserrat"/>
               </a:rPr>
               <a:t>anto</a:t>
             </a:r>
@@ -5063,10 +5049,10 @@
                 <a:solidFill>
                   <a:srgbClr val="FDF9ED"/>
                 </a:solidFill>
-                <a:latin typeface="Kabel"/>
-                <a:ea typeface="Kabel"/>
-                <a:cs typeface="Kabel"/>
-                <a:sym typeface="Kabel"/>
+                <a:latin typeface="Montserrat"/>
+                <a:ea typeface="Montserrat"/>
+                <a:cs typeface="Montserrat"/>
+                <a:sym typeface="Montserrat"/>
               </a:rPr>
               <a:t>T</a:t>
             </a:r>
@@ -5075,10 +5061,10 @@
                 <a:solidFill>
                   <a:srgbClr val="FDF9ED"/>
                 </a:solidFill>
-                <a:latin typeface="Kabel"/>
-                <a:ea typeface="Kabel"/>
-                <a:cs typeface="Kabel"/>
-                <a:sym typeface="Kabel"/>
+                <a:latin typeface="Montserrat"/>
+                <a:ea typeface="Montserrat"/>
+                <a:cs typeface="Montserrat"/>
+                <a:sym typeface="Montserrat"/>
               </a:rPr>
               <a:t>aylor Alonso</a:t>
             </a:r>
@@ -5119,10 +5105,10 @@
                 <a:solidFill>
                   <a:srgbClr val="3C7F72"/>
                 </a:solidFill>
-                <a:latin typeface="Loubag"/>
-                <a:ea typeface="Loubag"/>
-                <a:cs typeface="Loubag"/>
-                <a:sym typeface="Loubag"/>
+                <a:latin typeface="Montserrat"/>
+                <a:ea typeface="Montserrat"/>
+                <a:cs typeface="Montserrat"/>
+                <a:sym typeface="Montserrat"/>
               </a:rPr>
               <a:t>Our </a:t>
             </a:r>
@@ -5131,10 +5117,10 @@
                 <a:solidFill>
                   <a:srgbClr val="3C7F72"/>
                 </a:solidFill>
-                <a:latin typeface="Loubag"/>
-                <a:ea typeface="Loubag"/>
-                <a:cs typeface="Loubag"/>
-                <a:sym typeface="Loubag"/>
+                <a:latin typeface="Montserrat"/>
+                <a:ea typeface="Montserrat"/>
+                <a:cs typeface="Montserrat"/>
+                <a:sym typeface="Montserrat"/>
               </a:rPr>
               <a:t>Team</a:t>
             </a:r>
@@ -5172,10 +5158,10 @@
                 <a:solidFill>
                   <a:srgbClr val="992800"/>
                 </a:solidFill>
-                <a:latin typeface="Kabel"/>
-                <a:ea typeface="Kabel"/>
-                <a:cs typeface="Kabel"/>
-                <a:sym typeface="Kabel"/>
+                <a:latin typeface="Montserrat"/>
+                <a:ea typeface="Montserrat"/>
+                <a:cs typeface="Montserrat"/>
+                <a:sym typeface="Montserrat"/>
               </a:rPr>
               <a:t>Seb</a:t>
             </a:r>
@@ -5184,10 +5170,10 @@
                 <a:solidFill>
                   <a:srgbClr val="992800"/>
                 </a:solidFill>
-                <a:latin typeface="Kabel"/>
-                <a:ea typeface="Kabel"/>
-                <a:cs typeface="Kabel"/>
-                <a:sym typeface="Kabel"/>
+                <a:latin typeface="Montserrat"/>
+                <a:ea typeface="Montserrat"/>
+                <a:cs typeface="Montserrat"/>
+                <a:sym typeface="Montserrat"/>
               </a:rPr>
               <a:t>astian Bennett</a:t>
             </a:r>
@@ -5225,10 +5211,10 @@
                 <a:solidFill>
                   <a:srgbClr val="992800"/>
                 </a:solidFill>
-                <a:latin typeface="Kabel"/>
-                <a:ea typeface="Kabel"/>
-                <a:cs typeface="Kabel"/>
-                <a:sym typeface="Kabel"/>
+                <a:latin typeface="Montserrat"/>
+                <a:ea typeface="Montserrat"/>
+                <a:cs typeface="Montserrat"/>
+                <a:sym typeface="Montserrat"/>
               </a:rPr>
               <a:t>Founder</a:t>
             </a:r>
@@ -5266,10 +5252,10 @@
                 <a:solidFill>
                   <a:srgbClr val="FDF9ED"/>
                 </a:solidFill>
-                <a:latin typeface="Kabel"/>
-                <a:ea typeface="Kabel"/>
-                <a:cs typeface="Kabel"/>
-                <a:sym typeface="Kabel"/>
+                <a:latin typeface="Montserrat"/>
+                <a:ea typeface="Montserrat"/>
+                <a:cs typeface="Montserrat"/>
+                <a:sym typeface="Montserrat"/>
               </a:rPr>
               <a:t>CEO</a:t>
             </a:r>
@@ -5307,10 +5293,10 @@
                 <a:solidFill>
                   <a:srgbClr val="FDF9ED"/>
                 </a:solidFill>
-                <a:latin typeface="Kabel"/>
-                <a:ea typeface="Kabel"/>
-                <a:cs typeface="Kabel"/>
-                <a:sym typeface="Kabel"/>
+                <a:latin typeface="Montserrat"/>
+                <a:ea typeface="Montserrat"/>
+                <a:cs typeface="Montserrat"/>
+                <a:sym typeface="Montserrat"/>
               </a:rPr>
               <a:t>Finance</a:t>
             </a:r>
@@ -5348,10 +5334,10 @@
                 <a:solidFill>
                   <a:srgbClr val="FDF9ED"/>
                 </a:solidFill>
-                <a:latin typeface="Kabel"/>
-                <a:ea typeface="Kabel"/>
-                <a:cs typeface="Kabel"/>
-                <a:sym typeface="Kabel"/>
+                <a:latin typeface="Montserrat"/>
+                <a:ea typeface="Montserrat"/>
+                <a:cs typeface="Montserrat"/>
+                <a:sym typeface="Montserrat"/>
               </a:rPr>
               <a:t>HRD</a:t>
             </a:r>
@@ -5558,10 +5544,10 @@
                 <a:solidFill>
                   <a:srgbClr val="3C7F72"/>
                 </a:solidFill>
-                <a:latin typeface="Loubag"/>
-                <a:ea typeface="Loubag"/>
-                <a:cs typeface="Loubag"/>
-                <a:sym typeface="Loubag"/>
+                <a:latin typeface="Montserrat"/>
+                <a:ea typeface="Montserrat"/>
+                <a:cs typeface="Montserrat"/>
+                <a:sym typeface="Montserrat"/>
               </a:rPr>
               <a:t>Why Us</a:t>
             </a:r>
@@ -5599,10 +5585,10 @@
                 <a:solidFill>
                   <a:srgbClr val="FDF9ED"/>
                 </a:solidFill>
-                <a:latin typeface="Kabel"/>
-                <a:ea typeface="Kabel"/>
-                <a:cs typeface="Kabel"/>
-                <a:sym typeface="Kabel"/>
+                <a:latin typeface="Montserrat"/>
+                <a:ea typeface="Montserrat"/>
+                <a:cs typeface="Montserrat"/>
+                <a:sym typeface="Montserrat"/>
               </a:rPr>
               <a:t>Lorem ipsum dolor sit amet, consectetur adipiscing elit. Maecenas scelerisque sapien quam, et ornare tortor faucibus at. Nullam elementum dolor quis mollis eleifend. </a:t>
             </a:r>
@@ -5643,10 +5629,10 @@
                 <a:solidFill>
                   <a:srgbClr val="992800"/>
                 </a:solidFill>
-                <a:latin typeface="Kabel"/>
-                <a:ea typeface="Kabel"/>
-                <a:cs typeface="Kabel"/>
-                <a:sym typeface="Kabel"/>
+                <a:latin typeface="Montserrat"/>
+                <a:ea typeface="Montserrat"/>
+                <a:cs typeface="Montserrat"/>
+                <a:sym typeface="Montserrat"/>
               </a:rPr>
               <a:t>123 Anywhere St., Any City, ST 12345</a:t>
             </a:r>
@@ -5687,10 +5673,10 @@
                 <a:solidFill>
                   <a:srgbClr val="992800"/>
                 </a:solidFill>
-                <a:latin typeface="Kabel"/>
-                <a:ea typeface="Kabel"/>
-                <a:cs typeface="Kabel"/>
-                <a:sym typeface="Kabel"/>
+                <a:latin typeface="Montserrat"/>
+                <a:ea typeface="Montserrat"/>
+                <a:cs typeface="Montserrat"/>
+                <a:sym typeface="Montserrat"/>
               </a:rPr>
               <a:t>+123-456-7890</a:t>
             </a:r>
@@ -5731,10 +5717,10 @@
                 <a:solidFill>
                   <a:srgbClr val="992800"/>
                 </a:solidFill>
-                <a:latin typeface="Kabel"/>
-                <a:ea typeface="Kabel"/>
-                <a:cs typeface="Kabel"/>
-                <a:sym typeface="Kabel"/>
+                <a:latin typeface="Montserrat"/>
+                <a:ea typeface="Montserrat"/>
+                <a:cs typeface="Montserrat"/>
+                <a:sym typeface="Montserrat"/>
               </a:rPr>
               <a:t>hello@reallygreatsite.com</a:t>
             </a:r>
@@ -5938,10 +5924,10 @@
                 <a:solidFill>
                   <a:srgbClr val="FDF9ED"/>
                 </a:solidFill>
-                <a:latin typeface="Loubag"/>
-                <a:ea typeface="Loubag"/>
-                <a:cs typeface="Loubag"/>
-                <a:sym typeface="Loubag"/>
+                <a:latin typeface="Montserrat"/>
+                <a:ea typeface="Montserrat"/>
+                <a:cs typeface="Montserrat"/>
+                <a:sym typeface="Montserrat"/>
               </a:rPr>
               <a:t>Problem Statement</a:t>
             </a:r>
@@ -5979,10 +5965,10 @@
                 <a:solidFill>
                   <a:srgbClr val="992800"/>
                 </a:solidFill>
-                <a:latin typeface="Kabel"/>
-                <a:ea typeface="Kabel"/>
-                <a:cs typeface="Kabel"/>
-                <a:sym typeface="Kabel"/>
+                <a:latin typeface="Montserrat"/>
+                <a:ea typeface="Montserrat"/>
+                <a:cs typeface="Montserrat"/>
+                <a:sym typeface="Montserrat"/>
               </a:rPr>
               <a:t>Lorem ipsum dolor sit amet, consectetur adipiscing elit. </a:t>
             </a:r>
@@ -6005,10 +5991,10 @@
                 <a:solidFill>
                   <a:srgbClr val="992800"/>
                 </a:solidFill>
-                <a:latin typeface="Kabel"/>
-                <a:ea typeface="Kabel"/>
-                <a:cs typeface="Kabel"/>
-                <a:sym typeface="Kabel"/>
+                <a:latin typeface="Montserrat"/>
+                <a:ea typeface="Montserrat"/>
+                <a:cs typeface="Montserrat"/>
+                <a:sym typeface="Montserrat"/>
               </a:rPr>
               <a:t>Maecenas scelerisque sapien quam, et ornare tortor faucibus at. Nullam elementum dolor quis mollis eleifend. Sed in tempus quam. Donec augue tortor, suscipit sit amet cursus in, maximus sit amet tortor.</a:t>
             </a:r>
@@ -6825,10 +6811,10 @@
                 <a:solidFill>
                   <a:srgbClr val="3C7F72"/>
                 </a:solidFill>
-                <a:latin typeface="Loubag"/>
-                <a:ea typeface="Loubag"/>
-                <a:cs typeface="Loubag"/>
-                <a:sym typeface="Loubag"/>
+                <a:latin typeface="Montserrat"/>
+                <a:ea typeface="Montserrat"/>
+                <a:cs typeface="Montserrat"/>
+                <a:sym typeface="Montserrat"/>
               </a:rPr>
               <a:t>S</a:t>
             </a:r>
@@ -6837,10 +6823,10 @@
                 <a:solidFill>
                   <a:srgbClr val="3C7F72"/>
                 </a:solidFill>
-                <a:latin typeface="Loubag"/>
-                <a:ea typeface="Loubag"/>
-                <a:cs typeface="Loubag"/>
-                <a:sym typeface="Loubag"/>
+                <a:latin typeface="Montserrat"/>
+                <a:ea typeface="Montserrat"/>
+                <a:cs typeface="Montserrat"/>
+                <a:sym typeface="Montserrat"/>
               </a:rPr>
               <a:t>olution</a:t>
             </a:r>
@@ -6881,10 +6867,10 @@
                 <a:solidFill>
                   <a:srgbClr val="992800"/>
                 </a:solidFill>
-                <a:latin typeface="Kabel"/>
-                <a:ea typeface="Kabel"/>
-                <a:cs typeface="Kabel"/>
-                <a:sym typeface="Kabel"/>
+                <a:latin typeface="Montserrat"/>
+                <a:ea typeface="Montserrat"/>
+                <a:cs typeface="Montserrat"/>
+                <a:sym typeface="Montserrat"/>
               </a:rPr>
               <a:t>Lorem ipsum dolor sit amet, consectetur adipiscing elit. Maecenas scelerisque sapien quam, et ornare tortor faucibus at. </a:t>
             </a:r>
@@ -6925,10 +6911,10 @@
                 <a:solidFill>
                   <a:srgbClr val="992800"/>
                 </a:solidFill>
-                <a:latin typeface="Kabel Ultra-Bold"/>
-                <a:ea typeface="Kabel Ultra-Bold"/>
-                <a:cs typeface="Kabel Ultra-Bold"/>
-                <a:sym typeface="Kabel Ultra-Bold"/>
+                <a:latin typeface="Montserrat"/>
+                <a:ea typeface="Montserrat"/>
+                <a:cs typeface="Montserrat"/>
+                <a:sym typeface="Montserrat"/>
               </a:rPr>
               <a:t>Our Product</a:t>
             </a:r>
@@ -6969,10 +6955,10 @@
                 <a:solidFill>
                   <a:srgbClr val="992800"/>
                 </a:solidFill>
-                <a:latin typeface="Kabel"/>
-                <a:ea typeface="Kabel"/>
-                <a:cs typeface="Kabel"/>
-                <a:sym typeface="Kabel"/>
+                <a:latin typeface="Montserrat"/>
+                <a:ea typeface="Montserrat"/>
+                <a:cs typeface="Montserrat"/>
+                <a:sym typeface="Montserrat"/>
               </a:rPr>
               <a:t>Lorem ipsum dolor sit amet, consectetur adipiscing elit. Maecenas scelerisque sapien quam, et ornare tortor faucibus at. </a:t>
             </a:r>
@@ -7013,10 +6999,10 @@
                 <a:solidFill>
                   <a:srgbClr val="992800"/>
                 </a:solidFill>
-                <a:latin typeface="Kabel Ultra-Bold"/>
-                <a:ea typeface="Kabel Ultra-Bold"/>
-                <a:cs typeface="Kabel Ultra-Bold"/>
-                <a:sym typeface="Kabel Ultra-Bold"/>
+                <a:latin typeface="Montserrat"/>
+                <a:ea typeface="Montserrat"/>
+                <a:cs typeface="Montserrat"/>
+                <a:sym typeface="Montserrat"/>
               </a:rPr>
               <a:t>How this Product Solves the Problem</a:t>
             </a:r>
@@ -7057,10 +7043,10 @@
                 <a:solidFill>
                   <a:srgbClr val="992800"/>
                 </a:solidFill>
-                <a:latin typeface="Kabel"/>
-                <a:ea typeface="Kabel"/>
-                <a:cs typeface="Kabel"/>
-                <a:sym typeface="Kabel"/>
+                <a:latin typeface="Montserrat"/>
+                <a:ea typeface="Montserrat"/>
+                <a:cs typeface="Montserrat"/>
+                <a:sym typeface="Montserrat"/>
               </a:rPr>
               <a:t>Lorem ipsum dolor sit amet, consectetur adipiscing elit. Maecenas scelerisque sapien quam, et ornare tortor faucibus at. </a:t>
             </a:r>
@@ -7101,10 +7087,10 @@
                 <a:solidFill>
                   <a:srgbClr val="992800"/>
                 </a:solidFill>
-                <a:latin typeface="Kabel Ultra-Bold"/>
-                <a:ea typeface="Kabel Ultra-Bold"/>
-                <a:cs typeface="Kabel Ultra-Bold"/>
-                <a:sym typeface="Kabel Ultra-Bold"/>
+                <a:latin typeface="Montserrat"/>
+                <a:ea typeface="Montserrat"/>
+                <a:cs typeface="Montserrat"/>
+                <a:sym typeface="Montserrat"/>
               </a:rPr>
               <a:t>Unique Valu</a:t>
             </a:r>
@@ -7113,10 +7099,10 @@
                 <a:solidFill>
                   <a:srgbClr val="992800"/>
                 </a:solidFill>
-                <a:latin typeface="Kabel Ultra-Bold"/>
-                <a:ea typeface="Kabel Ultra-Bold"/>
-                <a:cs typeface="Kabel Ultra-Bold"/>
-                <a:sym typeface="Kabel Ultra-Bold"/>
+                <a:latin typeface="Montserrat"/>
+                <a:ea typeface="Montserrat"/>
+                <a:cs typeface="Montserrat"/>
+                <a:sym typeface="Montserrat"/>
               </a:rPr>
               <a:t>e Proposition</a:t>
             </a:r>
@@ -7493,10 +7479,10 @@
                 <a:solidFill>
                   <a:srgbClr val="3C7F72"/>
                 </a:solidFill>
-                <a:latin typeface="Loubag"/>
-                <a:ea typeface="Loubag"/>
-                <a:cs typeface="Loubag"/>
-                <a:sym typeface="Loubag"/>
+                <a:latin typeface="Montserrat"/>
+                <a:ea typeface="Montserrat"/>
+                <a:cs typeface="Montserrat"/>
+                <a:sym typeface="Montserrat"/>
               </a:rPr>
               <a:t>Marke</a:t>
             </a:r>
@@ -7505,10 +7491,10 @@
                 <a:solidFill>
                   <a:srgbClr val="3C7F72"/>
                 </a:solidFill>
-                <a:latin typeface="Loubag"/>
-                <a:ea typeface="Loubag"/>
-                <a:cs typeface="Loubag"/>
-                <a:sym typeface="Loubag"/>
+                <a:latin typeface="Montserrat"/>
+                <a:ea typeface="Montserrat"/>
+                <a:cs typeface="Montserrat"/>
+                <a:sym typeface="Montserrat"/>
               </a:rPr>
               <a:t>t Opportunity</a:t>
             </a:r>
@@ -7642,10 +7628,10 @@
                 <a:solidFill>
                   <a:srgbClr val="992800"/>
                 </a:solidFill>
-                <a:latin typeface="Kabel"/>
-                <a:ea typeface="Kabel"/>
-                <a:cs typeface="Kabel"/>
-                <a:sym typeface="Kabel"/>
+                <a:latin typeface="Montserrat"/>
+                <a:ea typeface="Montserrat"/>
+                <a:cs typeface="Montserrat"/>
+                <a:sym typeface="Montserrat"/>
               </a:rPr>
               <a:t>Lorem ipsum dolor sit amet, consectetur adipiscing elit. </a:t>
             </a:r>
@@ -7686,10 +7672,10 @@
                 <a:solidFill>
                   <a:srgbClr val="992800"/>
                 </a:solidFill>
-                <a:latin typeface="Kabel"/>
-                <a:ea typeface="Kabel"/>
-                <a:cs typeface="Kabel"/>
-                <a:sym typeface="Kabel"/>
+                <a:latin typeface="Montserrat"/>
+                <a:ea typeface="Montserrat"/>
+                <a:cs typeface="Montserrat"/>
+                <a:sym typeface="Montserrat"/>
               </a:rPr>
               <a:t>Lorem ipsum </a:t>
             </a:r>
@@ -7823,10 +7809,10 @@
                 <a:solidFill>
                   <a:srgbClr val="FDF9ED"/>
                 </a:solidFill>
-                <a:latin typeface="Kabel"/>
-                <a:ea typeface="Kabel"/>
-                <a:cs typeface="Kabel"/>
-                <a:sym typeface="Kabel"/>
+                <a:latin typeface="Montserrat"/>
+                <a:ea typeface="Montserrat"/>
+                <a:cs typeface="Montserrat"/>
+                <a:sym typeface="Montserrat"/>
               </a:rPr>
               <a:t>Lorem ipsum dolor sit amet, consectetur adipiscing elit. </a:t>
             </a:r>
@@ -7867,10 +7853,10 @@
                 <a:solidFill>
                   <a:srgbClr val="FDF9ED"/>
                 </a:solidFill>
-                <a:latin typeface="Kabel"/>
-                <a:ea typeface="Kabel"/>
-                <a:cs typeface="Kabel"/>
-                <a:sym typeface="Kabel"/>
+                <a:latin typeface="Montserrat"/>
+                <a:ea typeface="Montserrat"/>
+                <a:cs typeface="Montserrat"/>
+                <a:sym typeface="Montserrat"/>
               </a:rPr>
               <a:t>Lorem ipsum </a:t>
             </a:r>
@@ -7911,10 +7897,10 @@
                 <a:solidFill>
                   <a:srgbClr val="992800"/>
                 </a:solidFill>
-                <a:latin typeface="Kabel"/>
-                <a:ea typeface="Kabel"/>
-                <a:cs typeface="Kabel"/>
-                <a:sym typeface="Kabel"/>
+                <a:latin typeface="Montserrat"/>
+                <a:ea typeface="Montserrat"/>
+                <a:cs typeface="Montserrat"/>
+                <a:sym typeface="Montserrat"/>
               </a:rPr>
               <a:t>Lorem ipsum dolor sit amet, consectetur adipiscing elit. </a:t>
             </a:r>
@@ -7955,10 +7941,10 @@
                 <a:solidFill>
                   <a:srgbClr val="992800"/>
                 </a:solidFill>
-                <a:latin typeface="Kabel"/>
-                <a:ea typeface="Kabel"/>
-                <a:cs typeface="Kabel"/>
-                <a:sym typeface="Kabel"/>
+                <a:latin typeface="Montserrat"/>
+                <a:ea typeface="Montserrat"/>
+                <a:cs typeface="Montserrat"/>
+                <a:sym typeface="Montserrat"/>
               </a:rPr>
               <a:t>Lorem ipsum </a:t>
             </a:r>
@@ -7999,10 +7985,10 @@
                 <a:solidFill>
                   <a:srgbClr val="FDF9ED"/>
                 </a:solidFill>
-                <a:latin typeface="Kabel"/>
-                <a:ea typeface="Kabel"/>
-                <a:cs typeface="Kabel"/>
-                <a:sym typeface="Kabel"/>
+                <a:latin typeface="Montserrat"/>
+                <a:ea typeface="Montserrat"/>
+                <a:cs typeface="Montserrat"/>
+                <a:sym typeface="Montserrat"/>
               </a:rPr>
               <a:t>Lorem ipsum dolor sit amet, consectetur adipiscing elit. Maecenas scelerisque sapien quam, et ornare tortor faucibus at. </a:t>
             </a:r>
@@ -8209,10 +8195,10 @@
                 <a:solidFill>
                   <a:srgbClr val="3C7F72"/>
                 </a:solidFill>
-                <a:latin typeface="Loubag"/>
-                <a:ea typeface="Loubag"/>
-                <a:cs typeface="Loubag"/>
-                <a:sym typeface="Loubag"/>
+                <a:latin typeface="Montserrat"/>
+                <a:ea typeface="Montserrat"/>
+                <a:cs typeface="Montserrat"/>
+                <a:sym typeface="Montserrat"/>
               </a:rPr>
               <a:t>B</a:t>
             </a:r>
@@ -8221,10 +8207,10 @@
                 <a:solidFill>
                   <a:srgbClr val="3C7F72"/>
                 </a:solidFill>
-                <a:latin typeface="Loubag"/>
-                <a:ea typeface="Loubag"/>
-                <a:cs typeface="Loubag"/>
-                <a:sym typeface="Loubag"/>
+                <a:latin typeface="Montserrat"/>
+                <a:ea typeface="Montserrat"/>
+                <a:cs typeface="Montserrat"/>
+                <a:sym typeface="Montserrat"/>
               </a:rPr>
               <a:t>usiness Model</a:t>
             </a:r>
@@ -8265,10 +8251,10 @@
                 <a:solidFill>
                   <a:srgbClr val="992800"/>
                 </a:solidFill>
-                <a:latin typeface="Kabel"/>
-                <a:ea typeface="Kabel"/>
-                <a:cs typeface="Kabel"/>
-                <a:sym typeface="Kabel"/>
+                <a:latin typeface="Montserrat"/>
+                <a:ea typeface="Montserrat"/>
+                <a:cs typeface="Montserrat"/>
+                <a:sym typeface="Montserrat"/>
               </a:rPr>
               <a:t>Lorem ipsum dolor sit amet, consectetur adipiscing elit. Maecenas scelerisque sapien quam, et ornare tortor faucibus at. </a:t>
             </a:r>
@@ -8309,10 +8295,10 @@
                 <a:solidFill>
                   <a:srgbClr val="992800"/>
                 </a:solidFill>
-                <a:latin typeface="Kabel"/>
-                <a:ea typeface="Kabel"/>
-                <a:cs typeface="Kabel"/>
-                <a:sym typeface="Kabel"/>
+                <a:latin typeface="Montserrat"/>
+                <a:ea typeface="Montserrat"/>
+                <a:cs typeface="Montserrat"/>
+                <a:sym typeface="Montserrat"/>
               </a:rPr>
               <a:t>Pricing strategy</a:t>
             </a:r>
@@ -8353,10 +8339,10 @@
                 <a:solidFill>
                   <a:srgbClr val="992800"/>
                 </a:solidFill>
-                <a:latin typeface="Kabel"/>
-                <a:ea typeface="Kabel"/>
-                <a:cs typeface="Kabel"/>
-                <a:sym typeface="Kabel"/>
+                <a:latin typeface="Montserrat"/>
+                <a:ea typeface="Montserrat"/>
+                <a:cs typeface="Montserrat"/>
+                <a:sym typeface="Montserrat"/>
               </a:rPr>
               <a:t>Maecenas scelerisque sapien quam, et ornare tortor faucibus at. Nullam elementum dolor quis mollis eleifend. Sed in tempus quam. Donec augue tortor, suscipit sit amet cursus in, maximus sit amet tortor.</a:t>
             </a:r>
@@ -8606,10 +8592,10 @@
                 <a:solidFill>
                   <a:srgbClr val="3C7F72"/>
                 </a:solidFill>
-                <a:latin typeface="Loubag"/>
-                <a:ea typeface="Loubag"/>
-                <a:cs typeface="Loubag"/>
-                <a:sym typeface="Loubag"/>
+                <a:latin typeface="Montserrat"/>
+                <a:ea typeface="Montserrat"/>
+                <a:cs typeface="Montserrat"/>
+                <a:sym typeface="Montserrat"/>
               </a:rPr>
               <a:t>Product Overview</a:t>
             </a:r>
@@ -8650,10 +8636,10 @@
                 <a:solidFill>
                   <a:srgbClr val="992800"/>
                 </a:solidFill>
-                <a:latin typeface="Kabel"/>
-                <a:ea typeface="Kabel"/>
-                <a:cs typeface="Kabel"/>
-                <a:sym typeface="Kabel"/>
+                <a:latin typeface="Montserrat"/>
+                <a:ea typeface="Montserrat"/>
+                <a:cs typeface="Montserrat"/>
+                <a:sym typeface="Montserrat"/>
               </a:rPr>
               <a:t>Lorem ipsum dolor sit amet, consectetur adipiscing elit. Maecenas scelerisque sapien quam, et ornare tortor faucibus at. </a:t>
             </a:r>
@@ -8694,10 +8680,10 @@
                 <a:solidFill>
                   <a:srgbClr val="992800"/>
                 </a:solidFill>
-                <a:latin typeface="Kabel Ultra-Bold"/>
-                <a:ea typeface="Kabel Ultra-Bold"/>
-                <a:cs typeface="Kabel Ultra-Bold"/>
-                <a:sym typeface="Kabel Ultra-Bold"/>
+                <a:latin typeface="Montserrat"/>
+                <a:ea typeface="Montserrat"/>
+                <a:cs typeface="Montserrat"/>
+                <a:sym typeface="Montserrat"/>
               </a:rPr>
               <a:t>Lorem ipsum </a:t>
             </a:r>
@@ -8738,10 +8724,10 @@
                 <a:solidFill>
                   <a:srgbClr val="FDF9ED"/>
                 </a:solidFill>
-                <a:latin typeface="Kabel"/>
-                <a:ea typeface="Kabel"/>
-                <a:cs typeface="Kabel"/>
-                <a:sym typeface="Kabel"/>
+                <a:latin typeface="Montserrat"/>
+                <a:ea typeface="Montserrat"/>
+                <a:cs typeface="Montserrat"/>
+                <a:sym typeface="Montserrat"/>
               </a:rPr>
               <a:t>Lorem ipsum dolor sit amet, consectetur adipiscing elit. Maecenas scelerisque sapien quam, et ornare tortor faucibus at. </a:t>
             </a:r>
@@ -8782,10 +8768,10 @@
                 <a:solidFill>
                   <a:srgbClr val="FDF9ED"/>
                 </a:solidFill>
-                <a:latin typeface="Kabel Ultra-Bold"/>
-                <a:ea typeface="Kabel Ultra-Bold"/>
-                <a:cs typeface="Kabel Ultra-Bold"/>
-                <a:sym typeface="Kabel Ultra-Bold"/>
+                <a:latin typeface="Montserrat"/>
+                <a:ea typeface="Montserrat"/>
+                <a:cs typeface="Montserrat"/>
+                <a:sym typeface="Montserrat"/>
               </a:rPr>
               <a:t>Lorem ipsum </a:t>
             </a:r>
@@ -8826,10 +8812,10 @@
                 <a:solidFill>
                   <a:srgbClr val="992800"/>
                 </a:solidFill>
-                <a:latin typeface="Kabel"/>
-                <a:ea typeface="Kabel"/>
-                <a:cs typeface="Kabel"/>
-                <a:sym typeface="Kabel"/>
+                <a:latin typeface="Montserrat"/>
+                <a:ea typeface="Montserrat"/>
+                <a:cs typeface="Montserrat"/>
+                <a:sym typeface="Montserrat"/>
               </a:rPr>
               <a:t>Lorem ipsum dolor sit amet, consectetur adipiscing elit. Maecenas scelerisque sapien quam, et ornare tortor faucibus at. </a:t>
             </a:r>
@@ -8870,10 +8856,10 @@
                 <a:solidFill>
                   <a:srgbClr val="992800"/>
                 </a:solidFill>
-                <a:latin typeface="Kabel Ultra-Bold"/>
-                <a:ea typeface="Kabel Ultra-Bold"/>
-                <a:cs typeface="Kabel Ultra-Bold"/>
-                <a:sym typeface="Kabel Ultra-Bold"/>
+                <a:latin typeface="Montserrat"/>
+                <a:ea typeface="Montserrat"/>
+                <a:cs typeface="Montserrat"/>
+                <a:sym typeface="Montserrat"/>
               </a:rPr>
               <a:t>Lorem ipsum </a:t>
             </a:r>
@@ -8914,10 +8900,10 @@
                 <a:solidFill>
                   <a:srgbClr val="992800"/>
                 </a:solidFill>
-                <a:latin typeface="Kabel"/>
-                <a:ea typeface="Kabel"/>
-                <a:cs typeface="Kabel"/>
-                <a:sym typeface="Kabel"/>
+                <a:latin typeface="Montserrat"/>
+                <a:ea typeface="Montserrat"/>
+                <a:cs typeface="Montserrat"/>
+                <a:sym typeface="Montserrat"/>
               </a:rPr>
               <a:t>Maecenas scelerisque sapien quam, et ornare tortor faucibus at. Nullam elementum dolor quis mollis eleifend. </a:t>
             </a:r>
@@ -9249,10 +9235,10 @@
                 <a:solidFill>
                   <a:srgbClr val="FDF9ED"/>
                 </a:solidFill>
-                <a:latin typeface="Loubag"/>
-                <a:ea typeface="Loubag"/>
-                <a:cs typeface="Loubag"/>
-                <a:sym typeface="Loubag"/>
+                <a:latin typeface="Montserrat"/>
+                <a:ea typeface="Montserrat"/>
+                <a:cs typeface="Montserrat"/>
+                <a:sym typeface="Montserrat"/>
               </a:rPr>
               <a:t>Our User Testimony</a:t>
             </a:r>
@@ -9293,10 +9279,10 @@
                 <a:solidFill>
                   <a:srgbClr val="992800"/>
                 </a:solidFill>
-                <a:latin typeface="Kabel"/>
-                <a:ea typeface="Kabel"/>
-                <a:cs typeface="Kabel"/>
-                <a:sym typeface="Kabel"/>
+                <a:latin typeface="Montserrat"/>
+                <a:ea typeface="Montserrat"/>
+                <a:cs typeface="Montserrat"/>
+                <a:sym typeface="Montserrat"/>
               </a:rPr>
               <a:t>Lorem ipsum dolor sit amet, consectetur adipiscing elit. Maecenas scelerisque sapien quam, et ornare tortor faucibus at. </a:t>
             </a:r>
@@ -9337,10 +9323,10 @@
                 <a:solidFill>
                   <a:srgbClr val="992800"/>
                 </a:solidFill>
-                <a:latin typeface="Kabel"/>
-                <a:ea typeface="Kabel"/>
-                <a:cs typeface="Kabel"/>
-                <a:sym typeface="Kabel"/>
+                <a:latin typeface="Montserrat"/>
+                <a:ea typeface="Montserrat"/>
+                <a:cs typeface="Montserrat"/>
+                <a:sym typeface="Montserrat"/>
               </a:rPr>
               <a:t>Lorem ipsum </a:t>
             </a:r>
@@ -9381,10 +9367,10 @@
                 <a:solidFill>
                   <a:srgbClr val="FDF9ED"/>
                 </a:solidFill>
-                <a:latin typeface="Kabel"/>
-                <a:ea typeface="Kabel"/>
-                <a:cs typeface="Kabel"/>
-                <a:sym typeface="Kabel"/>
+                <a:latin typeface="Montserrat"/>
+                <a:ea typeface="Montserrat"/>
+                <a:cs typeface="Montserrat"/>
+                <a:sym typeface="Montserrat"/>
               </a:rPr>
               <a:t>Lorem ipsum dolor sit amet, consectetur adipiscing elit. Maecenas scelerisque sapien quam, et ornare tortor faucibus at. </a:t>
             </a:r>
@@ -9425,10 +9411,10 @@
                 <a:solidFill>
                   <a:srgbClr val="FDF9ED"/>
                 </a:solidFill>
-                <a:latin typeface="Kabel"/>
-                <a:ea typeface="Kabel"/>
-                <a:cs typeface="Kabel"/>
-                <a:sym typeface="Kabel"/>
+                <a:latin typeface="Montserrat"/>
+                <a:ea typeface="Montserrat"/>
+                <a:cs typeface="Montserrat"/>
+                <a:sym typeface="Montserrat"/>
               </a:rPr>
               <a:t>Lorem ipsum </a:t>
             </a:r>
@@ -9469,10 +9455,10 @@
                 <a:solidFill>
                   <a:srgbClr val="992800"/>
                 </a:solidFill>
-                <a:latin typeface="Kabel"/>
-                <a:ea typeface="Kabel"/>
-                <a:cs typeface="Kabel"/>
-                <a:sym typeface="Kabel"/>
+                <a:latin typeface="Montserrat"/>
+                <a:ea typeface="Montserrat"/>
+                <a:cs typeface="Montserrat"/>
+                <a:sym typeface="Montserrat"/>
               </a:rPr>
               <a:t>Lorem ipsum dolor sit amet, consectetur adipiscing elit. Maecenas scelerisque sapien quam, et ornare tortor faucibus at. </a:t>
             </a:r>
@@ -9513,10 +9499,10 @@
                 <a:solidFill>
                   <a:srgbClr val="992800"/>
                 </a:solidFill>
-                <a:latin typeface="Kabel"/>
-                <a:ea typeface="Kabel"/>
-                <a:cs typeface="Kabel"/>
-                <a:sym typeface="Kabel"/>
+                <a:latin typeface="Montserrat"/>
+                <a:ea typeface="Montserrat"/>
+                <a:cs typeface="Montserrat"/>
+                <a:sym typeface="Montserrat"/>
               </a:rPr>
               <a:t>Lorem ipsum </a:t>
             </a:r>
@@ -9738,10 +9724,10 @@
                 <a:solidFill>
                   <a:srgbClr val="3C7F72"/>
                 </a:solidFill>
-                <a:latin typeface="Loubag"/>
-                <a:ea typeface="Loubag"/>
-                <a:cs typeface="Loubag"/>
-                <a:sym typeface="Loubag"/>
+                <a:latin typeface="Montserrat"/>
+                <a:ea typeface="Montserrat"/>
+                <a:cs typeface="Montserrat"/>
+                <a:sym typeface="Montserrat"/>
               </a:rPr>
               <a:t>Competition &amp; Differentiation</a:t>
             </a:r>
@@ -9782,10 +9768,10 @@
                 <a:solidFill>
                   <a:srgbClr val="FDF9ED"/>
                 </a:solidFill>
-                <a:latin typeface="Kabel"/>
-                <a:ea typeface="Kabel"/>
-                <a:cs typeface="Kabel"/>
-                <a:sym typeface="Kabel"/>
+                <a:latin typeface="Montserrat"/>
+                <a:ea typeface="Montserrat"/>
+                <a:cs typeface="Montserrat"/>
+                <a:sym typeface="Montserrat"/>
               </a:rPr>
               <a:t>Positioning</a:t>
             </a:r>
@@ -9826,10 +9812,10 @@
                 <a:solidFill>
                   <a:srgbClr val="FDF9ED"/>
                 </a:solidFill>
-                <a:latin typeface="Kabel"/>
-                <a:ea typeface="Kabel"/>
-                <a:cs typeface="Kabel"/>
-                <a:sym typeface="Kabel"/>
+                <a:latin typeface="Montserrat"/>
+                <a:ea typeface="Montserrat"/>
+                <a:cs typeface="Montserrat"/>
+                <a:sym typeface="Montserrat"/>
               </a:rPr>
               <a:t>Maecenas scelerisque sapien quam, et ornare tortor faucibus at. Nullam elementum dolor quis mollis eleifend. Sed in tempus quam. </a:t>
             </a:r>
@@ -9870,10 +9856,10 @@
                 <a:solidFill>
                   <a:srgbClr val="992800"/>
                 </a:solidFill>
-                <a:latin typeface="Kabel"/>
-                <a:ea typeface="Kabel"/>
-                <a:cs typeface="Kabel"/>
-                <a:sym typeface="Kabel"/>
+                <a:latin typeface="Montserrat"/>
+                <a:ea typeface="Montserrat"/>
+                <a:cs typeface="Montserrat"/>
+                <a:sym typeface="Montserrat"/>
               </a:rPr>
               <a:t>O</a:t>
             </a:r>
@@ -9882,10 +9868,10 @@
                 <a:solidFill>
                   <a:srgbClr val="992800"/>
                 </a:solidFill>
-                <a:latin typeface="Kabel"/>
-                <a:ea typeface="Kabel"/>
-                <a:cs typeface="Kabel"/>
-                <a:sym typeface="Kabel"/>
+                <a:latin typeface="Montserrat"/>
+                <a:ea typeface="Montserrat"/>
+                <a:cs typeface="Montserrat"/>
+                <a:sym typeface="Montserrat"/>
               </a:rPr>
               <a:t>ur Advantage</a:t>
             </a:r>
@@ -9926,10 +9912,10 @@
                 <a:solidFill>
                   <a:srgbClr val="992800"/>
                 </a:solidFill>
-                <a:latin typeface="Kabel"/>
-                <a:ea typeface="Kabel"/>
-                <a:cs typeface="Kabel"/>
-                <a:sym typeface="Kabel"/>
+                <a:latin typeface="Montserrat"/>
+                <a:ea typeface="Montserrat"/>
+                <a:cs typeface="Montserrat"/>
+                <a:sym typeface="Montserrat"/>
               </a:rPr>
               <a:t>Lorem ipsum dolor sit amet, consectetur adipiscing elit. </a:t>
             </a:r>
@@ -9970,10 +9956,10 @@
                 <a:solidFill>
                   <a:srgbClr val="992800"/>
                 </a:solidFill>
-                <a:latin typeface="Kabel"/>
-                <a:ea typeface="Kabel"/>
-                <a:cs typeface="Kabel"/>
-                <a:sym typeface="Kabel"/>
+                <a:latin typeface="Montserrat"/>
+                <a:ea typeface="Montserrat"/>
+                <a:cs typeface="Montserrat"/>
+                <a:sym typeface="Montserrat"/>
               </a:rPr>
               <a:t>Lorem ipsum </a:t>
             </a:r>
@@ -10014,10 +10000,10 @@
                 <a:solidFill>
                   <a:srgbClr val="992800"/>
                 </a:solidFill>
-                <a:latin typeface="Kabel"/>
-                <a:ea typeface="Kabel"/>
-                <a:cs typeface="Kabel"/>
-                <a:sym typeface="Kabel"/>
+                <a:latin typeface="Montserrat"/>
+                <a:ea typeface="Montserrat"/>
+                <a:cs typeface="Montserrat"/>
+                <a:sym typeface="Montserrat"/>
               </a:rPr>
               <a:t>Lorem ipsum dolor sit amet, consectetur adipiscing elit. </a:t>
             </a:r>
@@ -10058,10 +10044,10 @@
                 <a:solidFill>
                   <a:srgbClr val="992800"/>
                 </a:solidFill>
-                <a:latin typeface="Kabel"/>
-                <a:ea typeface="Kabel"/>
-                <a:cs typeface="Kabel"/>
-                <a:sym typeface="Kabel"/>
+                <a:latin typeface="Montserrat"/>
+                <a:ea typeface="Montserrat"/>
+                <a:cs typeface="Montserrat"/>
+                <a:sym typeface="Montserrat"/>
               </a:rPr>
               <a:t>Lorem ipsum </a:t>
             </a:r>
@@ -10102,10 +10088,10 @@
                 <a:solidFill>
                   <a:srgbClr val="992800"/>
                 </a:solidFill>
-                <a:latin typeface="Kabel"/>
-                <a:ea typeface="Kabel"/>
-                <a:cs typeface="Kabel"/>
-                <a:sym typeface="Kabel"/>
+                <a:latin typeface="Montserrat"/>
+                <a:ea typeface="Montserrat"/>
+                <a:cs typeface="Montserrat"/>
+                <a:sym typeface="Montserrat"/>
               </a:rPr>
               <a:t>Lorem ipsum dolor sit amet, consectetur adipiscing elit. </a:t>
             </a:r>
@@ -10146,10 +10132,10 @@
                 <a:solidFill>
                   <a:srgbClr val="992800"/>
                 </a:solidFill>
-                <a:latin typeface="Kabel"/>
-                <a:ea typeface="Kabel"/>
-                <a:cs typeface="Kabel"/>
-                <a:sym typeface="Kabel"/>
+                <a:latin typeface="Montserrat"/>
+                <a:ea typeface="Montserrat"/>
+                <a:cs typeface="Montserrat"/>
+                <a:sym typeface="Montserrat"/>
               </a:rPr>
               <a:t>Lorem ipsum </a:t>
             </a:r>
@@ -10356,10 +10342,10 @@
                 <a:solidFill>
                   <a:srgbClr val="3C7F72"/>
                 </a:solidFill>
-                <a:latin typeface="Loubag"/>
-                <a:ea typeface="Loubag"/>
-                <a:cs typeface="Loubag"/>
-                <a:sym typeface="Loubag"/>
+                <a:latin typeface="Montserrat"/>
+                <a:ea typeface="Montserrat"/>
+                <a:cs typeface="Montserrat"/>
+                <a:sym typeface="Montserrat"/>
               </a:rPr>
               <a:t>Go-To-Market Strategy</a:t>
             </a:r>
@@ -10400,10 +10386,10 @@
                 <a:solidFill>
                   <a:srgbClr val="992800"/>
                 </a:solidFill>
-                <a:latin typeface="Kabel"/>
-                <a:ea typeface="Kabel"/>
-                <a:cs typeface="Kabel"/>
-                <a:sym typeface="Kabel"/>
+                <a:latin typeface="Montserrat"/>
+                <a:ea typeface="Montserrat"/>
+                <a:cs typeface="Montserrat"/>
+                <a:sym typeface="Montserrat"/>
               </a:rPr>
               <a:t>Lorem ipsum dolor sit amet, consectetur adipiscing elit. Maecenas scelerisque sapien quam, et ornare tortor faucibus at. </a:t>
             </a:r>
@@ -10444,10 +10430,10 @@
                 <a:solidFill>
                   <a:srgbClr val="992800"/>
                 </a:solidFill>
-                <a:latin typeface="Kabel"/>
-                <a:ea typeface="Kabel"/>
-                <a:cs typeface="Kabel"/>
-                <a:sym typeface="Kabel"/>
+                <a:latin typeface="Montserrat"/>
+                <a:ea typeface="Montserrat"/>
+                <a:cs typeface="Montserrat"/>
+                <a:sym typeface="Montserrat"/>
               </a:rPr>
               <a:t>Distribution &amp; Marketing Channel </a:t>
             </a:r>
@@ -10488,10 +10474,10 @@
                 <a:solidFill>
                   <a:srgbClr val="992800"/>
                 </a:solidFill>
-                <a:latin typeface="Kabel"/>
-                <a:ea typeface="Kabel"/>
-                <a:cs typeface="Kabel"/>
-                <a:sym typeface="Kabel"/>
+                <a:latin typeface="Montserrat"/>
+                <a:ea typeface="Montserrat"/>
+                <a:cs typeface="Montserrat"/>
+                <a:sym typeface="Montserrat"/>
               </a:rPr>
               <a:t>Lorem ipsum dolor sit amet, consectetur adipiscing elit. Maecenas scelerisque sapien quam, et ornare tortor faucibus at. </a:t>
             </a:r>
@@ -10532,10 +10518,10 @@
                 <a:solidFill>
                   <a:srgbClr val="992800"/>
                 </a:solidFill>
-                <a:latin typeface="Kabel"/>
-                <a:ea typeface="Kabel"/>
-                <a:cs typeface="Kabel"/>
-                <a:sym typeface="Kabel"/>
+                <a:latin typeface="Montserrat"/>
+                <a:ea typeface="Montserrat"/>
+                <a:cs typeface="Montserrat"/>
+                <a:sym typeface="Montserrat"/>
               </a:rPr>
               <a:t>Pa</a:t>
             </a:r>
@@ -10544,10 +10530,10 @@
                 <a:solidFill>
                   <a:srgbClr val="992800"/>
                 </a:solidFill>
-                <a:latin typeface="Kabel"/>
-                <a:ea typeface="Kabel"/>
-                <a:cs typeface="Kabel"/>
-                <a:sym typeface="Kabel"/>
+                <a:latin typeface="Montserrat"/>
+                <a:ea typeface="Montserrat"/>
+                <a:cs typeface="Montserrat"/>
+                <a:sym typeface="Montserrat"/>
               </a:rPr>
               <a:t>rtnership Plan</a:t>
             </a:r>
@@ -10588,10 +10574,10 @@
                 <a:solidFill>
                   <a:srgbClr val="992800"/>
                 </a:solidFill>
-                <a:latin typeface="Kabel"/>
-                <a:ea typeface="Kabel"/>
-                <a:cs typeface="Kabel"/>
-                <a:sym typeface="Kabel"/>
+                <a:latin typeface="Montserrat"/>
+                <a:ea typeface="Montserrat"/>
+                <a:cs typeface="Montserrat"/>
+                <a:sym typeface="Montserrat"/>
               </a:rPr>
               <a:t>Lorem ipsum dolor sit amet, consectetur adipiscing elit. Maecenas scelerisque sapien quam, et ornare tortor faucibus at. </a:t>
             </a:r>
@@ -10632,10 +10618,10 @@
                 <a:solidFill>
                   <a:srgbClr val="992800"/>
                 </a:solidFill>
-                <a:latin typeface="Kabel"/>
-                <a:ea typeface="Kabel"/>
-                <a:cs typeface="Kabel"/>
-                <a:sym typeface="Kabel"/>
+                <a:latin typeface="Montserrat"/>
+                <a:ea typeface="Montserrat"/>
+                <a:cs typeface="Montserrat"/>
+                <a:sym typeface="Montserrat"/>
               </a:rPr>
               <a:t>Cus</a:t>
             </a:r>
@@ -10644,10 +10630,10 @@
                 <a:solidFill>
                   <a:srgbClr val="992800"/>
                 </a:solidFill>
-                <a:latin typeface="Kabel"/>
-                <a:ea typeface="Kabel"/>
-                <a:cs typeface="Kabel"/>
-                <a:sym typeface="Kabel"/>
+                <a:latin typeface="Montserrat"/>
+                <a:ea typeface="Montserrat"/>
+                <a:cs typeface="Montserrat"/>
+                <a:sym typeface="Montserrat"/>
               </a:rPr>
               <a:t>tomer Acquisition Strategy</a:t>
             </a:r>
